--- a/effect-tests/style-library-v1/samples/style-sample-saas-product.pptx
+++ b/effect-tests/style-library-v1/samples/style-sample-saas-product.pptx
@@ -902,18 +902,123 @@
           </a:ln>
         </p:spPr>
       </p:sp>
-      <p:sp>
-        <p:nvSpPr>
-          <p:cNvPr id="3" name="Shape 1"/>
-          <p:cNvSpPr/>
-          <p:nvPr/>
-        </p:nvSpPr>
+      <p:pic>
+        <p:nvPicPr>
+          <p:cNvPr id="3" name="Image 0" descr="/Users/dw/Desktop/codex-visual-ppt-deck-builder/effect-tests/style-library-v1/assets/background-saas-product.png">    </p:cNvPr>
+          <p:cNvPicPr>
+            <a:picLocks noChangeAspect="1"/>
+          </p:cNvPicPr>
+          <p:nvPr/>
+        </p:nvPicPr>
+        <p:blipFill>
+          <a:blip r:embed="rId1"/>
+          <a:stretch>
+            <a:fillRect/>
+          </a:stretch>
+        </p:blipFill>
         <p:spPr>
           <a:xfrm>
             <a:off x="0" y="0"/>
-            <a:ext cx="82296" cy="6858000"/>
-          </a:xfrm>
-          <a:prstGeom prst="rect">
+            <a:ext cx="12191695" cy="6858000"/>
+          </a:xfrm>
+          <a:prstGeom prst="rect">
+            <a:avLst/>
+          </a:prstGeom>
+        </p:spPr>
+      </p:pic>
+      <p:sp>
+        <p:nvSpPr>
+          <p:cNvPr id="4" name="Shape 1"/>
+          <p:cNvSpPr/>
+          <p:nvPr/>
+        </p:nvSpPr>
+        <p:spPr>
+          <a:xfrm>
+            <a:off x="0" y="0"/>
+            <a:ext cx="12191695" cy="6858000"/>
+          </a:xfrm>
+          <a:prstGeom prst="rect">
+            <a:avLst/>
+          </a:prstGeom>
+          <a:solidFill>
+            <a:srgbClr val="F8FAFC">
+              <a:alpha val="82000"/>
+            </a:srgbClr>
+          </a:solidFill>
+          <a:ln w="12700">
+            <a:solidFill>
+              <a:srgbClr val="333333">
+                <a:alpha val="0"/>
+              </a:srgbClr>
+            </a:solidFill>
+            <a:prstDash val="solid"/>
+          </a:ln>
+        </p:spPr>
+      </p:sp>
+      <p:sp>
+        <p:nvSpPr>
+          <p:cNvPr id="5" name="Shape 2"/>
+          <p:cNvSpPr/>
+          <p:nvPr/>
+        </p:nvSpPr>
+        <p:spPr>
+          <a:xfrm>
+            <a:off x="512064" y="676656"/>
+            <a:ext cx="384048" cy="0"/>
+          </a:xfrm>
+          <a:prstGeom prst="line">
+            <a:avLst/>
+          </a:prstGeom>
+          <a:noFill/>
+          <a:ln w="17780">
+            <a:solidFill>
+              <a:srgbClr val="2563EB">
+                <a:alpha val="92000"/>
+              </a:srgbClr>
+            </a:solidFill>
+            <a:prstDash val="solid"/>
+          </a:ln>
+        </p:spPr>
+      </p:sp>
+      <p:sp>
+        <p:nvSpPr>
+          <p:cNvPr id="6" name="Shape 3"/>
+          <p:cNvSpPr/>
+          <p:nvPr/>
+        </p:nvSpPr>
+        <p:spPr>
+          <a:xfrm>
+            <a:off x="9985248" y="5577840"/>
+            <a:ext cx="73152" cy="73152"/>
+          </a:xfrm>
+          <a:prstGeom prst="ellipse">
+            <a:avLst/>
+          </a:prstGeom>
+          <a:solidFill>
+            <a:srgbClr val="22C55E"/>
+          </a:solidFill>
+          <a:ln w="12700">
+            <a:solidFill>
+              <a:srgbClr val="333333">
+                <a:alpha val="0"/>
+              </a:srgbClr>
+            </a:solidFill>
+            <a:prstDash val="solid"/>
+          </a:ln>
+        </p:spPr>
+      </p:sp>
+      <p:sp>
+        <p:nvSpPr>
+          <p:cNvPr id="7" name="Shape 4"/>
+          <p:cNvSpPr/>
+          <p:nvPr/>
+        </p:nvSpPr>
+        <p:spPr>
+          <a:xfrm>
+            <a:off x="10168128" y="5577840"/>
+            <a:ext cx="73152" cy="73152"/>
+          </a:xfrm>
+          <a:prstGeom prst="ellipse">
             <a:avLst/>
           </a:prstGeom>
           <a:solidFill>
@@ -921,7 +1026,7 @@
           </a:solidFill>
           <a:ln w="12700">
             <a:solidFill>
-              <a:srgbClr val="2563EB">
+              <a:srgbClr val="333333">
                 <a:alpha val="0"/>
               </a:srgbClr>
             </a:solidFill>
@@ -931,14 +1036,14 @@
       </p:sp>
       <p:sp>
         <p:nvSpPr>
-          <p:cNvPr id="4" name="Text 2"/>
-          <p:cNvSpPr/>
-          <p:nvPr/>
-        </p:nvSpPr>
-        <p:spPr>
-          <a:xfrm>
-            <a:off x="658368" y="420624"/>
-            <a:ext cx="2011680" cy="164592"/>
+          <p:cNvPr id="8" name="Text 5"/>
+          <p:cNvSpPr/>
+          <p:nvPr/>
+        </p:nvSpPr>
+        <p:spPr>
+          <a:xfrm>
+            <a:off x="658368" y="402336"/>
+            <a:ext cx="2468880" cy="164592"/>
           </a:xfrm>
           <a:prstGeom prst="rect">
             <a:avLst/>
@@ -960,11 +1065,11 @@
                 <a:solidFill>
                   <a:srgbClr val="2563EB"/>
                 </a:solidFill>
-                <a:latin typeface="PingFang SC" pitchFamily="34" charset="0"/>
-                <a:ea typeface="PingFang SC" pitchFamily="34" charset="-122"/>
-                <a:cs typeface="PingFang SC" pitchFamily="34" charset="-120"/>
+                <a:latin typeface="Avenir Next" pitchFamily="34" charset="0"/>
+                <a:ea typeface="Avenir Next" pitchFamily="34" charset="-122"/>
+                <a:cs typeface="Avenir Next" pitchFamily="34" charset="-120"/>
               </a:rPr>
-              <a:t>2026 RESEARCH</a:t>
+              <a:t>PRODUCT STRATEGY</a:t>
             </a:r>
             <a:endParaRPr lang="en-US" sz="750" dirty="0"/>
           </a:p>
@@ -972,14 +1077,14 @@
       </p:sp>
       <p:sp>
         <p:nvSpPr>
-          <p:cNvPr id="5" name="Text 3"/>
-          <p:cNvSpPr/>
-          <p:nvPr/>
-        </p:nvSpPr>
-        <p:spPr>
-          <a:xfrm>
-            <a:off x="658368" y="694944"/>
-            <a:ext cx="5212080" cy="777240"/>
+          <p:cNvPr id="9" name="Text 6"/>
+          <p:cNvSpPr/>
+          <p:nvPr/>
+        </p:nvSpPr>
+        <p:spPr>
+          <a:xfrm>
+            <a:off x="658368" y="749808"/>
+            <a:ext cx="5212080" cy="822960"/>
           </a:xfrm>
           <a:prstGeom prst="rect">
             <a:avLst/>
@@ -1013,14 +1118,14 @@
       </p:sp>
       <p:sp>
         <p:nvSpPr>
-          <p:cNvPr id="6" name="Text 4"/>
-          <p:cNvSpPr/>
-          <p:nvPr/>
-        </p:nvSpPr>
-        <p:spPr>
-          <a:xfrm>
-            <a:off x="694944" y="1463040"/>
-            <a:ext cx="4114800" cy="228600"/>
+          <p:cNvPr id="10" name="Text 7"/>
+          <p:cNvSpPr/>
+          <p:nvPr/>
+        </p:nvSpPr>
+        <p:spPr>
+          <a:xfrm>
+            <a:off x="694944" y="1481328"/>
+            <a:ext cx="4389120" cy="219456"/>
           </a:xfrm>
           <a:prstGeom prst="rect">
             <a:avLst/>
@@ -1038,7 +1143,7 @@
               <a:buNone/>
             </a:pPr>
             <a:r>
-              <a:rPr lang="en-US" sz="1050" b="1" dirty="0">
+              <a:rPr lang="en-US" sz="1020" b="1" dirty="0">
                 <a:solidFill>
                   <a:srgbClr val="2563EB"/>
                 </a:solidFill>
@@ -1048,20 +1153,20 @@
               </a:rPr>
               <a:t>产品增长方案样张</a:t>
             </a:r>
-            <a:endParaRPr lang="en-US" sz="1050" dirty="0"/>
+            <a:endParaRPr lang="en-US" sz="1020" dirty="0"/>
           </a:p>
         </p:txBody>
       </p:sp>
       <p:sp>
         <p:nvSpPr>
-          <p:cNvPr id="7" name="Shape 5"/>
+          <p:cNvPr id="11" name="Shape 8"/>
           <p:cNvSpPr/>
           <p:nvPr/>
         </p:nvSpPr>
         <p:spPr>
           <a:xfrm>
             <a:off x="768096" y="1938528"/>
-            <a:ext cx="4251960" cy="0"/>
+            <a:ext cx="4160520" cy="0"/>
           </a:xfrm>
           <a:prstGeom prst="line">
             <a:avLst/>
@@ -1079,14 +1184,14 @@
       </p:sp>
       <p:sp>
         <p:nvSpPr>
-          <p:cNvPr id="8" name="Text 6"/>
+          <p:cNvPr id="12" name="Text 9"/>
           <p:cNvSpPr/>
           <p:nvPr/>
         </p:nvSpPr>
         <p:spPr>
           <a:xfrm>
             <a:off x="768096" y="2121408"/>
-            <a:ext cx="1645920" cy="256032"/>
+            <a:ext cx="2011680" cy="256032"/>
           </a:xfrm>
           <a:prstGeom prst="rect">
             <a:avLst/>
@@ -1120,14 +1225,14 @@
       </p:sp>
       <p:sp>
         <p:nvSpPr>
-          <p:cNvPr id="9" name="Text 7"/>
+          <p:cNvPr id="13" name="Text 10"/>
           <p:cNvSpPr/>
           <p:nvPr/>
         </p:nvSpPr>
         <p:spPr>
           <a:xfrm>
             <a:off x="768096" y="2624328"/>
-            <a:ext cx="4526280" cy="603504"/>
+            <a:ext cx="4434840" cy="640080"/>
           </a:xfrm>
           <a:prstGeom prst="rect">
             <a:avLst/>
@@ -1161,7 +1266,7 @@
       </p:sp>
       <p:sp>
         <p:nvSpPr>
-          <p:cNvPr id="10" name="Shape 8"/>
+          <p:cNvPr id="14" name="Shape 11"/>
           <p:cNvSpPr/>
           <p:nvPr/>
         </p:nvSpPr>
@@ -1188,7 +1293,7 @@
       </p:sp>
       <p:sp>
         <p:nvSpPr>
-          <p:cNvPr id="11" name="Text 9"/>
+          <p:cNvPr id="15" name="Text 12"/>
           <p:cNvSpPr/>
           <p:nvPr/>
         </p:nvSpPr>
@@ -1229,7 +1334,7 @@
       </p:sp>
       <p:sp>
         <p:nvSpPr>
-          <p:cNvPr id="12" name="Shape 10"/>
+          <p:cNvPr id="16" name="Shape 13"/>
           <p:cNvSpPr/>
           <p:nvPr/>
         </p:nvSpPr>
@@ -1256,7 +1361,7 @@
       </p:sp>
       <p:sp>
         <p:nvSpPr>
-          <p:cNvPr id="13" name="Text 11"/>
+          <p:cNvPr id="17" name="Text 14"/>
           <p:cNvSpPr/>
           <p:nvPr/>
         </p:nvSpPr>
@@ -1297,7 +1402,7 @@
       </p:sp>
       <p:sp>
         <p:nvSpPr>
-          <p:cNvPr id="14" name="Shape 12"/>
+          <p:cNvPr id="18" name="Shape 15"/>
           <p:cNvSpPr/>
           <p:nvPr/>
         </p:nvSpPr>
@@ -1324,7 +1429,7 @@
       </p:sp>
       <p:sp>
         <p:nvSpPr>
-          <p:cNvPr id="15" name="Text 13"/>
+          <p:cNvPr id="19" name="Text 16"/>
           <p:cNvSpPr/>
           <p:nvPr/>
         </p:nvSpPr>
@@ -1365,7 +1470,7 @@
       </p:sp>
       <p:sp>
         <p:nvSpPr>
-          <p:cNvPr id="16" name="Shape 14"/>
+          <p:cNvPr id="20" name="Shape 17"/>
           <p:cNvSpPr/>
           <p:nvPr/>
         </p:nvSpPr>
@@ -1390,14 +1495,14 @@
       </p:sp>
       <p:sp>
         <p:nvSpPr>
-          <p:cNvPr id="17" name="Text 15"/>
+          <p:cNvPr id="21" name="Text 18"/>
           <p:cNvSpPr/>
           <p:nvPr/>
         </p:nvSpPr>
         <p:spPr>
           <a:xfrm>
             <a:off x="768096" y="5111496"/>
-            <a:ext cx="1542288" cy="329184"/>
+            <a:ext cx="1560576" cy="329184"/>
           </a:xfrm>
           <a:prstGeom prst="rect">
             <a:avLst/>
@@ -1431,14 +1536,14 @@
       </p:sp>
       <p:sp>
         <p:nvSpPr>
-          <p:cNvPr id="18" name="Text 16"/>
+          <p:cNvPr id="22" name="Text 19"/>
           <p:cNvSpPr/>
           <p:nvPr/>
         </p:nvSpPr>
         <p:spPr>
           <a:xfrm>
             <a:off x="768096" y="5477256"/>
-            <a:ext cx="1542288" cy="228600"/>
+            <a:ext cx="1560576" cy="228600"/>
           </a:xfrm>
           <a:prstGeom prst="rect">
             <a:avLst/>
@@ -1472,7 +1577,7 @@
       </p:sp>
       <p:sp>
         <p:nvSpPr>
-          <p:cNvPr id="19" name="Shape 17"/>
+          <p:cNvPr id="23" name="Shape 20"/>
           <p:cNvSpPr/>
           <p:nvPr/>
         </p:nvSpPr>
@@ -1497,14 +1602,14 @@
       </p:sp>
       <p:sp>
         <p:nvSpPr>
-          <p:cNvPr id="20" name="Text 18"/>
+          <p:cNvPr id="24" name="Text 21"/>
           <p:cNvSpPr/>
           <p:nvPr/>
         </p:nvSpPr>
         <p:spPr>
           <a:xfrm>
             <a:off x="2474976" y="5111496"/>
-            <a:ext cx="1542288" cy="329184"/>
+            <a:ext cx="1560576" cy="329184"/>
           </a:xfrm>
           <a:prstGeom prst="rect">
             <a:avLst/>
@@ -1538,14 +1643,14 @@
       </p:sp>
       <p:sp>
         <p:nvSpPr>
-          <p:cNvPr id="21" name="Text 19"/>
+          <p:cNvPr id="25" name="Text 22"/>
           <p:cNvSpPr/>
           <p:nvPr/>
         </p:nvSpPr>
         <p:spPr>
           <a:xfrm>
             <a:off x="2474976" y="5477256"/>
-            <a:ext cx="1542288" cy="228600"/>
+            <a:ext cx="1560576" cy="228600"/>
           </a:xfrm>
           <a:prstGeom prst="rect">
             <a:avLst/>
@@ -1579,7 +1684,7 @@
       </p:sp>
       <p:sp>
         <p:nvSpPr>
-          <p:cNvPr id="22" name="Shape 20"/>
+          <p:cNvPr id="26" name="Shape 23"/>
           <p:cNvSpPr/>
           <p:nvPr/>
         </p:nvSpPr>
@@ -1604,14 +1709,14 @@
       </p:sp>
       <p:sp>
         <p:nvSpPr>
-          <p:cNvPr id="23" name="Text 21"/>
+          <p:cNvPr id="27" name="Text 24"/>
           <p:cNvSpPr/>
           <p:nvPr/>
         </p:nvSpPr>
         <p:spPr>
           <a:xfrm>
             <a:off x="4181856" y="5111496"/>
-            <a:ext cx="1542288" cy="329184"/>
+            <a:ext cx="1560576" cy="329184"/>
           </a:xfrm>
           <a:prstGeom prst="rect">
             <a:avLst/>
@@ -1645,14 +1750,14 @@
       </p:sp>
       <p:sp>
         <p:nvSpPr>
-          <p:cNvPr id="24" name="Text 22"/>
+          <p:cNvPr id="28" name="Text 25"/>
           <p:cNvSpPr/>
           <p:nvPr/>
         </p:nvSpPr>
         <p:spPr>
           <a:xfrm>
             <a:off x="4181856" y="5477256"/>
-            <a:ext cx="1542288" cy="228600"/>
+            <a:ext cx="1560576" cy="228600"/>
           </a:xfrm>
           <a:prstGeom prst="rect">
             <a:avLst/>
@@ -1686,14 +1791,14 @@
       </p:sp>
       <p:sp>
         <p:nvSpPr>
-          <p:cNvPr id="25" name="Text 23"/>
-          <p:cNvSpPr/>
-          <p:nvPr/>
-        </p:nvSpPr>
-        <p:spPr>
-          <a:xfrm>
-            <a:off x="6656832" y="1490472"/>
-            <a:ext cx="2011680" cy="237744"/>
+          <p:cNvPr id="29" name="Text 26"/>
+          <p:cNvSpPr/>
+          <p:nvPr/>
+        </p:nvSpPr>
+        <p:spPr>
+          <a:xfrm>
+            <a:off x="6583680" y="1554480"/>
+            <a:ext cx="2377440" cy="237744"/>
           </a:xfrm>
           <a:prstGeom prst="rect">
             <a:avLst/>
@@ -1719,7 +1824,7 @@
                 <a:ea typeface="PingFang SC" pitchFamily="34" charset="-122"/>
                 <a:cs typeface="PingFang SC" pitchFamily="34" charset="-120"/>
               </a:rPr>
-              <a:t>趋势指数</a:t>
+              <a:t>增长路径</a:t>
             </a:r>
             <a:endParaRPr lang="en-US" sz="1280" dirty="0"/>
           </a:p>
@@ -1727,13 +1832,13 @@
       </p:sp>
       <p:sp>
         <p:nvSpPr>
-          <p:cNvPr id="26" name="Shape 24"/>
-          <p:cNvSpPr/>
-          <p:nvPr/>
-        </p:nvSpPr>
-        <p:spPr>
-          <a:xfrm>
-            <a:off x="6656832" y="1874520"/>
+          <p:cNvPr id="30" name="Shape 27"/>
+          <p:cNvSpPr/>
+          <p:nvPr/>
+        </p:nvSpPr>
+        <p:spPr>
+          <a:xfrm>
+            <a:off x="6419088" y="1810512"/>
             <a:ext cx="3931920" cy="0"/>
           </a:xfrm>
           <a:prstGeom prst="line">
@@ -1752,13 +1857,13 @@
       </p:sp>
       <p:sp>
         <p:nvSpPr>
-          <p:cNvPr id="27" name="Shape 25"/>
-          <p:cNvSpPr/>
-          <p:nvPr/>
-        </p:nvSpPr>
-        <p:spPr>
-          <a:xfrm>
-            <a:off x="6583680" y="4791456"/>
+          <p:cNvPr id="31" name="Shape 28"/>
+          <p:cNvSpPr/>
+          <p:nvPr/>
+        </p:nvSpPr>
+        <p:spPr>
+          <a:xfrm>
+            <a:off x="6419088" y="4919472"/>
             <a:ext cx="3931920" cy="0"/>
           </a:xfrm>
           <a:prstGeom prst="line">
@@ -1777,14 +1882,14 @@
       </p:sp>
       <p:sp>
         <p:nvSpPr>
-          <p:cNvPr id="28" name="Shape 26"/>
-          <p:cNvSpPr/>
-          <p:nvPr/>
-        </p:nvSpPr>
-        <p:spPr>
-          <a:xfrm>
-            <a:off x="6784848" y="3719962"/>
-            <a:ext cx="731520" cy="1071494"/>
+          <p:cNvPr id="32" name="Shape 29"/>
+          <p:cNvSpPr/>
+          <p:nvPr/>
+        </p:nvSpPr>
+        <p:spPr>
+          <a:xfrm>
+            <a:off x="6620256" y="3930823"/>
+            <a:ext cx="731520" cy="988649"/>
           </a:xfrm>
           <a:prstGeom prst="rect">
             <a:avLst/>
@@ -1804,13 +1909,40 @@
       </p:sp>
       <p:sp>
         <p:nvSpPr>
-          <p:cNvPr id="29" name="Text 27"/>
-          <p:cNvSpPr/>
-          <p:nvPr/>
-        </p:nvSpPr>
-        <p:spPr>
-          <a:xfrm>
-            <a:off x="6748272" y="4919472"/>
+          <p:cNvPr id="33" name="Shape 30"/>
+          <p:cNvSpPr/>
+          <p:nvPr/>
+        </p:nvSpPr>
+        <p:spPr>
+          <a:xfrm>
+            <a:off x="6922008" y="3857671"/>
+            <a:ext cx="128016" cy="128016"/>
+          </a:xfrm>
+          <a:prstGeom prst="ellipse">
+            <a:avLst/>
+          </a:prstGeom>
+          <a:solidFill>
+            <a:srgbClr val="2563EB"/>
+          </a:solidFill>
+          <a:ln w="12700">
+            <a:solidFill>
+              <a:srgbClr val="333333">
+                <a:alpha val="0"/>
+              </a:srgbClr>
+            </a:solidFill>
+            <a:prstDash val="solid"/>
+          </a:ln>
+        </p:spPr>
+      </p:sp>
+      <p:sp>
+        <p:nvSpPr>
+          <p:cNvPr id="34" name="Text 31"/>
+          <p:cNvSpPr/>
+          <p:nvPr/>
+        </p:nvSpPr>
+        <p:spPr>
+          <a:xfrm>
+            <a:off x="6583680" y="5047488"/>
             <a:ext cx="804672" cy="164592"/>
           </a:xfrm>
           <a:prstGeom prst="rect">
@@ -1845,14 +1977,14 @@
       </p:sp>
       <p:sp>
         <p:nvSpPr>
-          <p:cNvPr id="30" name="Shape 28"/>
-          <p:cNvSpPr/>
-          <p:nvPr/>
-        </p:nvSpPr>
-        <p:spPr>
-          <a:xfrm>
-            <a:off x="7717536" y="3158703"/>
-            <a:ext cx="731520" cy="1632753"/>
+          <p:cNvPr id="35" name="Shape 32"/>
+          <p:cNvSpPr/>
+          <p:nvPr/>
+        </p:nvSpPr>
+        <p:spPr>
+          <a:xfrm>
+            <a:off x="7552944" y="3291108"/>
+            <a:ext cx="731520" cy="1628364"/>
           </a:xfrm>
           <a:prstGeom prst="rect">
             <a:avLst/>
@@ -1872,13 +2004,40 @@
       </p:sp>
       <p:sp>
         <p:nvSpPr>
-          <p:cNvPr id="31" name="Text 29"/>
-          <p:cNvSpPr/>
-          <p:nvPr/>
-        </p:nvSpPr>
-        <p:spPr>
-          <a:xfrm>
-            <a:off x="7680960" y="4919472"/>
+          <p:cNvPr id="36" name="Shape 33"/>
+          <p:cNvSpPr/>
+          <p:nvPr/>
+        </p:nvSpPr>
+        <p:spPr>
+          <a:xfrm>
+            <a:off x="7854696" y="3217956"/>
+            <a:ext cx="128016" cy="128016"/>
+          </a:xfrm>
+          <a:prstGeom prst="ellipse">
+            <a:avLst/>
+          </a:prstGeom>
+          <a:solidFill>
+            <a:srgbClr val="22C55E"/>
+          </a:solidFill>
+          <a:ln w="12700">
+            <a:solidFill>
+              <a:srgbClr val="333333">
+                <a:alpha val="0"/>
+              </a:srgbClr>
+            </a:solidFill>
+            <a:prstDash val="solid"/>
+          </a:ln>
+        </p:spPr>
+      </p:sp>
+      <p:sp>
+        <p:nvSpPr>
+          <p:cNvPr id="37" name="Text 34"/>
+          <p:cNvSpPr/>
+          <p:nvPr/>
+        </p:nvSpPr>
+        <p:spPr>
+          <a:xfrm>
+            <a:off x="7516368" y="5047488"/>
             <a:ext cx="804672" cy="164592"/>
           </a:xfrm>
           <a:prstGeom prst="rect">
@@ -1913,14 +2072,14 @@
       </p:sp>
       <p:sp>
         <p:nvSpPr>
-          <p:cNvPr id="32" name="Shape 30"/>
-          <p:cNvSpPr/>
-          <p:nvPr/>
-        </p:nvSpPr>
-        <p:spPr>
-          <a:xfrm>
-            <a:off x="8650224" y="2801539"/>
-            <a:ext cx="731520" cy="1989917"/>
+          <p:cNvPr id="38" name="Shape 35"/>
+          <p:cNvSpPr/>
+          <p:nvPr/>
+        </p:nvSpPr>
+        <p:spPr>
+          <a:xfrm>
+            <a:off x="8485632" y="2854940"/>
+            <a:ext cx="731520" cy="2064532"/>
           </a:xfrm>
           <a:prstGeom prst="rect">
             <a:avLst/>
@@ -1940,13 +2099,40 @@
       </p:sp>
       <p:sp>
         <p:nvSpPr>
-          <p:cNvPr id="33" name="Text 31"/>
-          <p:cNvSpPr/>
-          <p:nvPr/>
-        </p:nvSpPr>
-        <p:spPr>
-          <a:xfrm>
-            <a:off x="8613648" y="4919472"/>
+          <p:cNvPr id="39" name="Shape 36"/>
+          <p:cNvSpPr/>
+          <p:nvPr/>
+        </p:nvSpPr>
+        <p:spPr>
+          <a:xfrm>
+            <a:off x="8787384" y="2781788"/>
+            <a:ext cx="128016" cy="128016"/>
+          </a:xfrm>
+          <a:prstGeom prst="ellipse">
+            <a:avLst/>
+          </a:prstGeom>
+          <a:solidFill>
+            <a:srgbClr val="2563EB"/>
+          </a:solidFill>
+          <a:ln w="12700">
+            <a:solidFill>
+              <a:srgbClr val="333333">
+                <a:alpha val="0"/>
+              </a:srgbClr>
+            </a:solidFill>
+            <a:prstDash val="solid"/>
+          </a:ln>
+        </p:spPr>
+      </p:sp>
+      <p:sp>
+        <p:nvSpPr>
+          <p:cNvPr id="40" name="Text 37"/>
+          <p:cNvSpPr/>
+          <p:nvPr/>
+        </p:nvSpPr>
+        <p:spPr>
+          <a:xfrm>
+            <a:off x="8449056" y="5047488"/>
             <a:ext cx="804672" cy="164592"/>
           </a:xfrm>
           <a:prstGeom prst="rect">
@@ -1981,14 +2167,14 @@
       </p:sp>
       <p:sp>
         <p:nvSpPr>
-          <p:cNvPr id="34" name="Shape 32"/>
-          <p:cNvSpPr/>
-          <p:nvPr/>
-        </p:nvSpPr>
-        <p:spPr>
-          <a:xfrm>
-            <a:off x="9582912" y="2469886"/>
-            <a:ext cx="731520" cy="2321570"/>
+          <p:cNvPr id="41" name="Shape 38"/>
+          <p:cNvSpPr/>
+          <p:nvPr/>
+        </p:nvSpPr>
+        <p:spPr>
+          <a:xfrm>
+            <a:off x="9418320" y="2331537"/>
+            <a:ext cx="731520" cy="2587935"/>
           </a:xfrm>
           <a:prstGeom prst="rect">
             <a:avLst/>
@@ -2008,13 +2194,40 @@
       </p:sp>
       <p:sp>
         <p:nvSpPr>
-          <p:cNvPr id="35" name="Text 33"/>
-          <p:cNvSpPr/>
-          <p:nvPr/>
-        </p:nvSpPr>
-        <p:spPr>
-          <a:xfrm>
-            <a:off x="9546336" y="4919472"/>
+          <p:cNvPr id="42" name="Shape 39"/>
+          <p:cNvSpPr/>
+          <p:nvPr/>
+        </p:nvSpPr>
+        <p:spPr>
+          <a:xfrm>
+            <a:off x="9720072" y="2258385"/>
+            <a:ext cx="128016" cy="128016"/>
+          </a:xfrm>
+          <a:prstGeom prst="ellipse">
+            <a:avLst/>
+          </a:prstGeom>
+          <a:solidFill>
+            <a:srgbClr val="22C55E"/>
+          </a:solidFill>
+          <a:ln w="12700">
+            <a:solidFill>
+              <a:srgbClr val="333333">
+                <a:alpha val="0"/>
+              </a:srgbClr>
+            </a:solidFill>
+            <a:prstDash val="solid"/>
+          </a:ln>
+        </p:spPr>
+      </p:sp>
+      <p:sp>
+        <p:nvSpPr>
+          <p:cNvPr id="43" name="Text 40"/>
+          <p:cNvSpPr/>
+          <p:nvPr/>
+        </p:nvSpPr>
+        <p:spPr>
+          <a:xfrm>
+            <a:off x="9381744" y="5047488"/>
             <a:ext cx="804672" cy="164592"/>
           </a:xfrm>
           <a:prstGeom prst="rect">
@@ -2044,6 +2257,296 @@
               <a:t>扩展</a:t>
             </a:r>
             <a:endParaRPr lang="en-US" sz="680" dirty="0"/>
+          </a:p>
+        </p:txBody>
+      </p:sp>
+      <p:sp>
+        <p:nvSpPr>
+          <p:cNvPr id="44" name="Shape 41"/>
+          <p:cNvSpPr/>
+          <p:nvPr/>
+        </p:nvSpPr>
+        <p:spPr>
+          <a:xfrm>
+            <a:off x="6940296" y="3848527"/>
+            <a:ext cx="91440" cy="91440"/>
+          </a:xfrm>
+          <a:prstGeom prst="ellipse">
+            <a:avLst/>
+          </a:prstGeom>
+          <a:solidFill>
+            <a:srgbClr val="22C55E"/>
+          </a:solidFill>
+          <a:ln w="12700">
+            <a:solidFill>
+              <a:srgbClr val="333333">
+                <a:alpha val="0"/>
+              </a:srgbClr>
+            </a:solidFill>
+            <a:prstDash val="solid"/>
+          </a:ln>
+        </p:spPr>
+      </p:sp>
+      <p:sp>
+        <p:nvSpPr>
+          <p:cNvPr id="45" name="Shape 42"/>
+          <p:cNvSpPr/>
+          <p:nvPr/>
+        </p:nvSpPr>
+        <p:spPr>
+          <a:xfrm>
+            <a:off x="7872984" y="3208812"/>
+            <a:ext cx="91440" cy="91440"/>
+          </a:xfrm>
+          <a:prstGeom prst="ellipse">
+            <a:avLst/>
+          </a:prstGeom>
+          <a:solidFill>
+            <a:srgbClr val="22C55E"/>
+          </a:solidFill>
+          <a:ln w="12700">
+            <a:solidFill>
+              <a:srgbClr val="333333">
+                <a:alpha val="0"/>
+              </a:srgbClr>
+            </a:solidFill>
+            <a:prstDash val="solid"/>
+          </a:ln>
+        </p:spPr>
+      </p:sp>
+      <p:sp>
+        <p:nvSpPr>
+          <p:cNvPr id="46" name="Shape 43"/>
+          <p:cNvSpPr/>
+          <p:nvPr/>
+        </p:nvSpPr>
+        <p:spPr>
+          <a:xfrm>
+            <a:off x="8805672" y="2772644"/>
+            <a:ext cx="91440" cy="91440"/>
+          </a:xfrm>
+          <a:prstGeom prst="ellipse">
+            <a:avLst/>
+          </a:prstGeom>
+          <a:solidFill>
+            <a:srgbClr val="22C55E"/>
+          </a:solidFill>
+          <a:ln w="12700">
+            <a:solidFill>
+              <a:srgbClr val="333333">
+                <a:alpha val="0"/>
+              </a:srgbClr>
+            </a:solidFill>
+            <a:prstDash val="solid"/>
+          </a:ln>
+        </p:spPr>
+      </p:sp>
+      <p:sp>
+        <p:nvSpPr>
+          <p:cNvPr id="47" name="Shape 44"/>
+          <p:cNvSpPr/>
+          <p:nvPr/>
+        </p:nvSpPr>
+        <p:spPr>
+          <a:xfrm>
+            <a:off x="9738360" y="2249241"/>
+            <a:ext cx="91440" cy="91440"/>
+          </a:xfrm>
+          <a:prstGeom prst="ellipse">
+            <a:avLst/>
+          </a:prstGeom>
+          <a:solidFill>
+            <a:srgbClr val="22C55E"/>
+          </a:solidFill>
+          <a:ln w="12700">
+            <a:solidFill>
+              <a:srgbClr val="333333">
+                <a:alpha val="0"/>
+              </a:srgbClr>
+            </a:solidFill>
+            <a:prstDash val="solid"/>
+          </a:ln>
+        </p:spPr>
+      </p:sp>
+      <p:sp>
+        <p:nvSpPr>
+          <p:cNvPr id="48" name="Shape 45"/>
+          <p:cNvSpPr/>
+          <p:nvPr/>
+        </p:nvSpPr>
+        <p:spPr>
+          <a:xfrm>
+            <a:off x="6986016" y="3894247"/>
+            <a:ext cx="932688" cy="-639714"/>
+          </a:xfrm>
+          <a:prstGeom prst="line">
+            <a:avLst/>
+          </a:prstGeom>
+          <a:noFill/>
+          <a:ln w="17780">
+            <a:solidFill>
+              <a:srgbClr val="22C55E">
+                <a:alpha val="82000"/>
+              </a:srgbClr>
+            </a:solidFill>
+            <a:prstDash val="solid"/>
+          </a:ln>
+        </p:spPr>
+      </p:sp>
+      <p:sp>
+        <p:nvSpPr>
+          <p:cNvPr id="49" name="Shape 46"/>
+          <p:cNvSpPr/>
+          <p:nvPr/>
+        </p:nvSpPr>
+        <p:spPr>
+          <a:xfrm>
+            <a:off x="7918704" y="3254532"/>
+            <a:ext cx="932688" cy="-436169"/>
+          </a:xfrm>
+          <a:prstGeom prst="line">
+            <a:avLst/>
+          </a:prstGeom>
+          <a:noFill/>
+          <a:ln w="17780">
+            <a:solidFill>
+              <a:srgbClr val="22C55E">
+                <a:alpha val="82000"/>
+              </a:srgbClr>
+            </a:solidFill>
+            <a:prstDash val="solid"/>
+          </a:ln>
+        </p:spPr>
+      </p:sp>
+      <p:sp>
+        <p:nvSpPr>
+          <p:cNvPr id="50" name="Shape 47"/>
+          <p:cNvSpPr/>
+          <p:nvPr/>
+        </p:nvSpPr>
+        <p:spPr>
+          <a:xfrm>
+            <a:off x="8851392" y="2818364"/>
+            <a:ext cx="932688" cy="-523403"/>
+          </a:xfrm>
+          <a:prstGeom prst="line">
+            <a:avLst/>
+          </a:prstGeom>
+          <a:noFill/>
+          <a:ln w="17780">
+            <a:solidFill>
+              <a:srgbClr val="22C55E">
+                <a:alpha val="82000"/>
+              </a:srgbClr>
+            </a:solidFill>
+            <a:prstDash val="solid"/>
+          </a:ln>
+        </p:spPr>
+      </p:sp>
+      <p:sp>
+        <p:nvSpPr>
+          <p:cNvPr id="51" name="Shape 48"/>
+          <p:cNvSpPr/>
+          <p:nvPr/>
+        </p:nvSpPr>
+        <p:spPr>
+          <a:xfrm>
+            <a:off x="768096" y="6254496"/>
+            <a:ext cx="475488" cy="0"/>
+          </a:xfrm>
+          <a:prstGeom prst="line">
+            <a:avLst/>
+          </a:prstGeom>
+          <a:noFill/>
+          <a:ln w="19050">
+            <a:solidFill>
+              <a:srgbClr val="2563EB">
+                <a:alpha val="90000"/>
+              </a:srgbClr>
+            </a:solidFill>
+            <a:prstDash val="solid"/>
+          </a:ln>
+        </p:spPr>
+      </p:sp>
+      <p:sp>
+        <p:nvSpPr>
+          <p:cNvPr id="52" name="Text 49"/>
+          <p:cNvSpPr/>
+          <p:nvPr/>
+        </p:nvSpPr>
+        <p:spPr>
+          <a:xfrm>
+            <a:off x="1389888" y="6163056"/>
+            <a:ext cx="5669280" cy="164592"/>
+          </a:xfrm>
+          <a:prstGeom prst="rect">
+            <a:avLst/>
+          </a:prstGeom>
+          <a:noFill/>
+          <a:ln/>
+        </p:spPr>
+        <p:txBody>
+          <a:bodyPr wrap="square" lIns="0" tIns="0" rIns="0" bIns="0" rtlCol="0" anchor="ctr">
+            <a:normAutofit/>
+          </a:bodyPr>
+          <a:lstStyle/>
+          <a:p>
+            <a:pPr algn="l" indent="0" marL="0">
+              <a:buNone/>
+            </a:pPr>
+            <a:r>
+              <a:rPr lang="en-US" sz="740" dirty="0">
+                <a:solidFill>
+                  <a:srgbClr val="64748B"/>
+                </a:solidFill>
+                <a:latin typeface="PingFang SC" pitchFamily="34" charset="0"/>
+                <a:ea typeface="PingFang SC" pitchFamily="34" charset="-122"/>
+                <a:cs typeface="PingFang SC" pitchFamily="34" charset="-120"/>
+              </a:rPr>
+              <a:t>文字、数字和图表标签均为 PPT 可编辑对象</a:t>
+            </a:r>
+            <a:endParaRPr lang="en-US" sz="740" dirty="0"/>
+          </a:p>
+        </p:txBody>
+      </p:sp>
+      <p:sp>
+        <p:nvSpPr>
+          <p:cNvPr id="53" name="Text 50"/>
+          <p:cNvSpPr/>
+          <p:nvPr/>
+        </p:nvSpPr>
+        <p:spPr>
+          <a:xfrm>
+            <a:off x="9875520" y="6291072"/>
+            <a:ext cx="914400" cy="146304"/>
+          </a:xfrm>
+          <a:prstGeom prst="rect">
+            <a:avLst/>
+          </a:prstGeom>
+          <a:noFill/>
+          <a:ln/>
+        </p:spPr>
+        <p:txBody>
+          <a:bodyPr wrap="square" lIns="0" tIns="0" rIns="0" bIns="0" rtlCol="0" anchor="ctr">
+            <a:normAutofit/>
+          </a:bodyPr>
+          <a:lstStyle/>
+          <a:p>
+            <a:pPr algn="r" indent="0" marL="0">
+              <a:buNone/>
+            </a:pPr>
+            <a:r>
+              <a:rPr lang="en-US" sz="720" b="1" dirty="0">
+                <a:solidFill>
+                  <a:srgbClr val="2563EB"/>
+                </a:solidFill>
+                <a:latin typeface="Avenir Next" pitchFamily="34" charset="0"/>
+                <a:ea typeface="Avenir Next" pitchFamily="34" charset="-122"/>
+                <a:cs typeface="Avenir Next" pitchFamily="34" charset="-120"/>
+              </a:rPr>
+              <a:t>SaaS 产品</a:t>
+            </a:r>
+            <a:endParaRPr lang="en-US" sz="720" dirty="0"/>
           </a:p>
         </p:txBody>
       </p:sp>
